--- a/output/archive/QuenverellData/marketing/capabilities/2025/quenverell-capabilities-bioinformatics-2025_v2_DRAFT.pptx
+++ b/output/archive/QuenverellData/marketing/capabilities/2025/quenverell-capabilities-bioinformatics-2025_v2_DRAFT.pptx
@@ -866,7 +866,7 @@
           <a:lstStyle/>
           <a:p>
             <a:r>
-              <a:t>Client anonymised. Numbers on this slide are the engagement's own counts, not assay results.</a:t>
+              <a:t>TZ: keep it qualitative until the client signs off.</a:t>
             </a:r>
           </a:p>
         </p:txBody>
@@ -4421,7 +4421,7 @@
               <a:rPr sz="2000">
                 <a:latin typeface="Arial"/>
               </a:rPr>
-              <a:t>Question: which of 40 candidate genes justify an assay build?</a:t>
+              <a:t>Question: which candidate genes justify building a cell assay?</a:t>
             </a:r>
           </a:p>
           <a:p>
@@ -4430,7 +4430,7 @@
               <a:rPr sz="2000">
                 <a:latin typeface="Arial"/>
               </a:rPr>
-              <a:t>Combined patient-tissue RNA-seq, genetic evidence and pathway context</a:t>
+              <a:t>Combined patient-tissue RNA-seq, genetic evidence and pathway context to prioritise candidates</a:t>
             </a:r>
           </a:p>
           <a:p>
@@ -4439,7 +4439,7 @@
               <a:rPr sz="2000">
                 <a:latin typeface="Arial"/>
               </a:rPr>
-              <a:t>Seven targets ranked high; two dropped for broad tissue expression risk</a:t>
+              <a:t>Flagged candidates with broad tissue expression as safety risks</a:t>
             </a:r>
           </a:p>
           <a:p>
@@ -4448,7 +4448,7 @@
               <a:rPr sz="2000">
                 <a:latin typeface="Arial"/>
               </a:rPr>
-              <a:t>Client built cell assays for the top three with Brindlewythe within the quarter</a:t>
+              <a:t>The client commissioned follow-up cell assays with Brindlewythe for the top-ranked targets</a:t>
             </a:r>
           </a:p>
         </p:txBody>
